--- a/symposium/symposium presentation.pptx
+++ b/symposium/symposium presentation.pptx
@@ -114,6 +114,11 @@
       </a:defRPr>
     </a:lvl9pPr>
   </p:defaultTextStyle>
+  <p:extLst>
+    <p:ext uri="{EFAFB233-063F-42B5-8137-9DF3F51BA10A}">
+      <p15:sldGuideLst xmlns:p15="http://schemas.microsoft.com/office/powerpoint/2012/main"/>
+    </p:ext>
+  </p:extLst>
 </p:presentation>
 </file>
 
@@ -1168,7 +1173,7 @@
         <a:lstStyle/>
         <a:p>
           <a:r>
-            <a:rPr lang="en-US"/>
+            <a:rPr lang="en-US" dirty="0"/>
             <a:t>Model</a:t>
           </a:r>
         </a:p>
@@ -1469,7 +1474,7 @@
       <dgm:spPr/>
     </dgm:pt>
     <dgm:pt modelId="{42613308-C07D-46DD-AEFF-CFF6F9BCAE13}" type="pres">
-      <dgm:prSet presAssocID="{43DC02EF-1333-4C2B-9716-B5603FD66C7B}" presName="desTx" presStyleLbl="revTx" presStyleIdx="3" presStyleCnt="6">
+      <dgm:prSet presAssocID="{43DC02EF-1333-4C2B-9716-B5603FD66C7B}" presName="desTx" presStyleLbl="revTx" presStyleIdx="3" presStyleCnt="6" custScaleX="92714" custScaleY="82348">
         <dgm:presLayoutVars/>
       </dgm:prSet>
       <dgm:spPr/>
@@ -2109,8 +2114,8 @@
       </dsp:nvSpPr>
       <dsp:spPr>
         <a:xfrm>
-          <a:off x="3862782" y="2286714"/>
-          <a:ext cx="2377886" cy="912971"/>
+          <a:off x="3949409" y="2367293"/>
+          <a:ext cx="2204633" cy="751813"/>
         </a:xfrm>
         <a:prstGeom prst="rect">
           <a:avLst/>
@@ -2139,7 +2144,7 @@
         </a:bodyPr>
         <a:lstStyle/>
         <a:p>
-          <a:pPr marL="0" lvl="0" indent="0" algn="l" defTabSz="800100">
+          <a:pPr marL="0" lvl="0" indent="0" algn="l" defTabSz="711200">
             <a:lnSpc>
               <a:spcPct val="90000"/>
             </a:lnSpc>
@@ -2152,12 +2157,12 @@
             <a:buNone/>
           </a:pPr>
           <a:r>
-            <a:rPr lang="en-US" sz="1800" kern="1200"/>
+            <a:rPr lang="en-US" sz="1600" kern="1200" dirty="0"/>
             <a:t>Model</a:t>
           </a:r>
         </a:p>
         <a:p>
-          <a:pPr marL="0" lvl="0" indent="0" algn="l" defTabSz="800100">
+          <a:pPr marL="0" lvl="0" indent="0" algn="l" defTabSz="711200">
             <a:lnSpc>
               <a:spcPct val="90000"/>
             </a:lnSpc>
@@ -2170,14 +2175,14 @@
             <a:buNone/>
           </a:pPr>
           <a:r>
-            <a:rPr lang="en-US" sz="1800" kern="1200"/>
+            <a:rPr lang="en-US" sz="1600" kern="1200"/>
             <a:t>Datasets</a:t>
           </a:r>
         </a:p>
       </dsp:txBody>
       <dsp:txXfrm>
-        <a:off x="3862782" y="2286714"/>
-        <a:ext cx="2377886" cy="912971"/>
+        <a:off x="3949409" y="2367293"/>
+        <a:ext cx="2204633" cy="751813"/>
       </dsp:txXfrm>
     </dsp:sp>
     <dsp:sp modelId="{447D7950-AC85-4744-BE71-F28238BA5687}">
@@ -3975,7 +3980,7 @@
           <a:p>
             <a:fld id="{17F50B8E-A176-49F2-A3C1-FEDA0200170B}" type="datetime2">
               <a:rPr lang="en-US" smtClean="0"/>
-              <a:t>Thursday, October 16, 2025</a:t>
+              <a:t>Friday, October 17, 2025</a:t>
             </a:fld>
             <a:endParaRPr lang="en-US" dirty="0"/>
           </a:p>
@@ -4184,7 +4189,7 @@
           <a:p>
             <a:fld id="{0512A49D-4A7C-4944-9802-8EE0B5A6CEDD}" type="datetime2">
               <a:rPr lang="en-US" smtClean="0"/>
-              <a:t>Thursday, October 16, 2025</a:t>
+              <a:t>Friday, October 17, 2025</a:t>
             </a:fld>
             <a:endParaRPr lang="en-US"/>
           </a:p>
@@ -4397,7 +4402,7 @@
           <a:p>
             <a:fld id="{5D689DDD-3B11-4150-8B39-3662C10D8BF9}" type="datetime2">
               <a:rPr lang="en-US" smtClean="0"/>
-              <a:t>Thursday, October 16, 2025</a:t>
+              <a:t>Friday, October 17, 2025</a:t>
             </a:fld>
             <a:endParaRPr lang="en-US"/>
           </a:p>
@@ -4621,7 +4626,7 @@
           <a:p>
             <a:fld id="{57997BA6-BEF8-495F-ACCD-8D19769E4FC6}" type="datetime2">
               <a:rPr lang="en-US" smtClean="0"/>
-              <a:t>Thursday, October 16, 2025</a:t>
+              <a:t>Friday, October 17, 2025</a:t>
             </a:fld>
             <a:endParaRPr lang="en-US" dirty="0"/>
           </a:p>
@@ -4904,7 +4909,7 @@
           <a:p>
             <a:fld id="{4857292D-4609-4E55-92E3-C12C6A1234E8}" type="datetime2">
               <a:rPr lang="en-US" smtClean="0"/>
-              <a:t>Thursday, October 16, 2025</a:t>
+              <a:t>Friday, October 17, 2025</a:t>
             </a:fld>
             <a:endParaRPr lang="en-US" dirty="0"/>
           </a:p>
@@ -5287,7 +5292,7 @@
           <a:p>
             <a:fld id="{003E0E29-2C79-4A2A-B61C-A21B8362A50A}" type="datetime2">
               <a:rPr lang="en-US" smtClean="0"/>
-              <a:t>Thursday, October 16, 2025</a:t>
+              <a:t>Friday, October 17, 2025</a:t>
             </a:fld>
             <a:endParaRPr lang="en-US"/>
           </a:p>
@@ -5781,7 +5786,7 @@
           <a:p>
             <a:fld id="{B0CA0177-5432-41AC-9593-8EC96BFF4F82}" type="datetime2">
               <a:rPr lang="en-US" smtClean="0"/>
-              <a:t>Thursday, October 16, 2025</a:t>
+              <a:t>Friday, October 17, 2025</a:t>
             </a:fld>
             <a:endParaRPr lang="en-US" dirty="0"/>
           </a:p>
@@ -5937,7 +5942,7 @@
           <a:p>
             <a:fld id="{EED29A7B-B2F1-41A3-B969-4E25F618B967}" type="datetime2">
               <a:rPr lang="en-US" smtClean="0"/>
-              <a:t>Thursday, October 16, 2025</a:t>
+              <a:t>Friday, October 17, 2025</a:t>
             </a:fld>
             <a:endParaRPr lang="en-US" dirty="0"/>
           </a:p>
@@ -6347,7 +6352,7 @@
           <a:p>
             <a:fld id="{4EE98B79-F222-4FD1-8713-07459E1B5004}" type="datetime2">
               <a:rPr lang="en-US" smtClean="0"/>
-              <a:t>Thursday, October 16, 2025</a:t>
+              <a:t>Friday, October 17, 2025</a:t>
             </a:fld>
             <a:endParaRPr lang="en-US"/>
           </a:p>
@@ -6669,7 +6674,7 @@
           <a:p>
             <a:fld id="{792630FD-0818-4065-B5FE-410552D9B1BC}" type="datetime2">
               <a:rPr lang="en-US" smtClean="0"/>
-              <a:t>Thursday, October 16, 2025</a:t>
+              <a:t>Friday, October 17, 2025</a:t>
             </a:fld>
             <a:endParaRPr lang="en-US"/>
           </a:p>
@@ -6971,7 +6976,7 @@
           <a:p>
             <a:fld id="{93C2D289-0EBF-40C7-B6E8-60285281F180}" type="datetime2">
               <a:rPr lang="en-US" smtClean="0"/>
-              <a:t>Thursday, October 16, 2025</a:t>
+              <a:t>Friday, October 17, 2025</a:t>
             </a:fld>
             <a:endParaRPr lang="en-US"/>
           </a:p>
@@ -7506,7 +7511,7 @@
           <a:p>
             <a:fld id="{94CDC665-7415-4DAF-AE09-B9BBC1907393}" type="datetime2">
               <a:rPr lang="en-US" smtClean="0"/>
-              <a:t>Thursday, October 16, 2025</a:t>
+              <a:t>Friday, October 17, 2025</a:t>
             </a:fld>
             <a:endParaRPr lang="en-US" dirty="0"/>
           </a:p>
@@ -8403,15 +8408,7 @@
             <a:pPr algn="l"/>
             <a:r>
               <a:rPr lang="en-US" sz="2200" dirty="0"/>
-              <a:t>17 </a:t>
-            </a:r>
-            <a:r>
-              <a:rPr lang="en-US" sz="2200" dirty="0" err="1"/>
-              <a:t>oktober</a:t>
-            </a:r>
-            <a:r>
-              <a:rPr lang="en-US" sz="2200" dirty="0"/>
-              <a:t> 2025</a:t>
+              <a:t>17 October 2025</a:t>
             </a:r>
           </a:p>
         </p:txBody>
@@ -8730,8 +8727,8 @@
         </p:blipFill>
         <p:spPr>
           <a:xfrm>
-            <a:off x="6579289" y="1690688"/>
-            <a:ext cx="4384367" cy="4206875"/>
+            <a:off x="5742432" y="801239"/>
+            <a:ext cx="5477256" cy="5255521"/>
           </a:xfrm>
           <a:prstGeom prst="rect">
             <a:avLst/>
@@ -8841,8 +8838,8 @@
         </p:nvSpPr>
         <p:spPr>
           <a:xfrm>
-            <a:off x="420624" y="1825625"/>
-            <a:ext cx="3181836" cy="1325563"/>
+            <a:off x="420623" y="1825625"/>
+            <a:ext cx="3665239" cy="1325563"/>
           </a:xfrm>
           <a:prstGeom prst="rect">
             <a:avLst/>
@@ -9040,7 +9037,7 @@
           <a:p>
             <a:r>
               <a:rPr lang="en-US" dirty="0"/>
-              <a:t>Mean change -8.82</a:t>
+              <a:t>Mean change -8.82 for FFHQ</a:t>
             </a:r>
           </a:p>
         </p:txBody>
@@ -9139,6 +9136,49 @@
             <a:r>
               <a:rPr lang="en-US" dirty="0"/>
               <a:t>Possible directions for next few weeks?</a:t>
+            </a:r>
+          </a:p>
+          <a:p>
+            <a:pPr lvl="1"/>
+            <a:r>
+              <a:rPr lang="en-US" dirty="0"/>
+              <a:t>Hand pick examples from the heavy </a:t>
+            </a:r>
+            <a:r>
+              <a:rPr lang="en-US" dirty="0" err="1"/>
+              <a:t>makeupset</a:t>
+            </a:r>
+            <a:r>
+              <a:rPr lang="en-US" dirty="0"/>
+              <a:t> for detailed analysis</a:t>
+            </a:r>
+          </a:p>
+          <a:p>
+            <a:pPr lvl="1"/>
+            <a:r>
+              <a:rPr lang="en-US" dirty="0"/>
+              <a:t>Model heatmap</a:t>
+            </a:r>
+          </a:p>
+          <a:p>
+            <a:pPr lvl="1"/>
+            <a:r>
+              <a:rPr lang="en-US" dirty="0"/>
+              <a:t>Comparison with human perception based on literature</a:t>
+            </a:r>
+          </a:p>
+          <a:p>
+            <a:pPr lvl="1"/>
+            <a:r>
+              <a:rPr lang="en-US" dirty="0"/>
+              <a:t>Reconsidering model?</a:t>
+            </a:r>
+          </a:p>
+          <a:p>
+            <a:pPr lvl="1"/>
+            <a:r>
+              <a:rPr lang="en-US" dirty="0"/>
+              <a:t>Finding more non synthetic data or removing this set</a:t>
             </a:r>
           </a:p>
           <a:p>
@@ -9693,7 +9733,7 @@
                   <a:spcPts val="600"/>
                 </a:spcAft>
               </a:pPr>
-              <a:t>Thursday, October 16, 2025</a:t>
+              <a:t>Friday, October 17, 2025</a:t>
             </a:fld>
             <a:endParaRPr lang="en-US"/>
           </a:p>
@@ -9861,7 +9901,7 @@
             <p:ph idx="1"/>
             <p:extLst>
               <p:ext uri="{D42A27DB-BD31-4B8C-83A1-F6EECF244321}">
-                <p14:modId xmlns:p14="http://schemas.microsoft.com/office/powerpoint/2010/main" val="3087412820"/>
+                <p14:modId xmlns:p14="http://schemas.microsoft.com/office/powerpoint/2010/main" val="1452478545"/>
               </p:ext>
             </p:extLst>
           </p:nvPr>
@@ -9997,7 +10037,7 @@
             <a:pPr lvl="1"/>
             <a:r>
               <a:rPr lang="en-US" dirty="0"/>
-              <a:t>Reshaping face</a:t>
+              <a:t>Altering landmarks</a:t>
             </a:r>
           </a:p>
         </p:txBody>
@@ -10025,7 +10065,7 @@
           <a:p>
             <a:fld id="{57997BA6-BEF8-495F-ACCD-8D19769E4FC6}" type="datetime2">
               <a:rPr lang="en-US" smtClean="0"/>
-              <a:t>Thursday, October 16, 2025</a:t>
+              <a:t>Friday, October 17, 2025</a:t>
             </a:fld>
             <a:endParaRPr lang="en-US" dirty="0"/>
           </a:p>
@@ -10786,7 +10826,7 @@
                   <a:spcPts val="600"/>
                 </a:spcAft>
               </a:pPr>
-              <a:t>Thursday, October 16, 2025</a:t>
+              <a:t>Friday, October 17, 2025</a:t>
             </a:fld>
             <a:endParaRPr lang="en-US"/>
           </a:p>
@@ -11100,7 +11140,7 @@
             <a:pPr lvl="1"/>
             <a:r>
               <a:rPr lang="en-US" dirty="0" err="1"/>
-              <a:t>Populai</a:t>
+              <a:t>Populair</a:t>
             </a:r>
             <a:endParaRPr lang="en-US" dirty="0"/>
           </a:p>
@@ -11152,7 +11192,7 @@
           <a:p>
             <a:fld id="{57997BA6-BEF8-495F-ACCD-8D19769E4FC6}" type="datetime2">
               <a:rPr lang="en-US" smtClean="0"/>
-              <a:t>Thursday, October 16, 2025</a:t>
+              <a:t>Friday, October 17, 2025</a:t>
             </a:fld>
             <a:endParaRPr lang="en-US" dirty="0"/>
           </a:p>
@@ -11262,6 +11302,14 @@
 <file path=ppt/slides/slide6.xml><?xml version="1.0" encoding="utf-8"?>
 <p:sld xmlns:a="http://schemas.openxmlformats.org/drawingml/2006/main" xmlns:r="http://schemas.openxmlformats.org/officeDocument/2006/relationships" xmlns:p="http://schemas.openxmlformats.org/presentationml/2006/main">
   <p:cSld>
+    <p:bg>
+      <p:bgPr>
+        <a:solidFill>
+          <a:schemeClr val="bg1"/>
+        </a:solidFill>
+        <a:effectLst/>
+      </p:bgPr>
+    </p:bg>
     <p:spTree>
       <p:nvGrpSpPr>
         <p:cNvPr id="1" name=""/>
@@ -11278,6 +11326,383 @@
       </p:grpSpPr>
       <p:sp>
         <p:nvSpPr>
+          <p:cNvPr id="1031" name="Rectangle 1030">
+            <a:extLst>
+              <a:ext uri="{FF2B5EF4-FFF2-40B4-BE49-F238E27FC236}">
+                <a16:creationId xmlns:a16="http://schemas.microsoft.com/office/drawing/2014/main" id="{73C994B4-9721-4148-9EEC-6793CECDE8DD}"/>
+              </a:ext>
+              <a:ext uri="{C183D7F6-B498-43B3-948B-1728B52AA6E4}">
+                <adec:decorative xmlns:adec="http://schemas.microsoft.com/office/drawing/2017/decorative" val="1"/>
+              </a:ext>
+            </a:extLst>
+          </p:cNvPr>
+          <p:cNvSpPr>
+            <a:spLocks noGrp="1" noRot="1" noChangeAspect="1" noMove="1" noResize="1" noEditPoints="1" noAdjustHandles="1" noChangeArrowheads="1" noChangeShapeType="1" noTextEdit="1"/>
+          </p:cNvSpPr>
+          <p:nvPr>
+            <p:extLst>
+              <p:ext uri="{386F3935-93C4-4BCD-93E2-E3B085C9AB24}">
+                <p16:designElem xmlns:p16="http://schemas.microsoft.com/office/powerpoint/2015/main" val="1"/>
+              </p:ext>
+            </p:extLst>
+          </p:nvPr>
+        </p:nvSpPr>
+        <p:spPr bwMode="white">
+          <a:xfrm>
+            <a:off x="1523" y="-1"/>
+            <a:ext cx="12188952" cy="6858000"/>
+          </a:xfrm>
+          <a:prstGeom prst="rect">
+            <a:avLst/>
+          </a:prstGeom>
+          <a:noFill/>
+          <a:ln>
+            <a:noFill/>
+          </a:ln>
+        </p:spPr>
+        <p:style>
+          <a:lnRef idx="2">
+            <a:schemeClr val="accent1">
+              <a:shade val="50000"/>
+            </a:schemeClr>
+          </a:lnRef>
+          <a:fillRef idx="1">
+            <a:schemeClr val="accent1"/>
+          </a:fillRef>
+          <a:effectRef idx="0">
+            <a:schemeClr val="accent1"/>
+          </a:effectRef>
+          <a:fontRef idx="minor">
+            <a:schemeClr val="lt1"/>
+          </a:fontRef>
+        </p:style>
+        <p:txBody>
+          <a:bodyPr rtlCol="0" anchor="ctr"/>
+          <a:lstStyle>
+            <a:defPPr>
+              <a:defRPr lang="en-US"/>
+            </a:defPPr>
+            <a:lvl1pPr marL="0" algn="l" defTabSz="914400" rtl="0" eaLnBrk="1" latinLnBrk="0" hangingPunct="1">
+              <a:defRPr sz="1800" kern="1200">
+                <a:solidFill>
+                  <a:schemeClr val="lt1"/>
+                </a:solidFill>
+                <a:latin typeface="+mn-lt"/>
+                <a:ea typeface="+mn-ea"/>
+                <a:cs typeface="+mn-cs"/>
+              </a:defRPr>
+            </a:lvl1pPr>
+            <a:lvl2pPr marL="457200" algn="l" defTabSz="914400" rtl="0" eaLnBrk="1" latinLnBrk="0" hangingPunct="1">
+              <a:defRPr sz="1800" kern="1200">
+                <a:solidFill>
+                  <a:schemeClr val="lt1"/>
+                </a:solidFill>
+                <a:latin typeface="+mn-lt"/>
+                <a:ea typeface="+mn-ea"/>
+                <a:cs typeface="+mn-cs"/>
+              </a:defRPr>
+            </a:lvl2pPr>
+            <a:lvl3pPr marL="914400" algn="l" defTabSz="914400" rtl="0" eaLnBrk="1" latinLnBrk="0" hangingPunct="1">
+              <a:defRPr sz="1800" kern="1200">
+                <a:solidFill>
+                  <a:schemeClr val="lt1"/>
+                </a:solidFill>
+                <a:latin typeface="+mn-lt"/>
+                <a:ea typeface="+mn-ea"/>
+                <a:cs typeface="+mn-cs"/>
+              </a:defRPr>
+            </a:lvl3pPr>
+            <a:lvl4pPr marL="1371600" algn="l" defTabSz="914400" rtl="0" eaLnBrk="1" latinLnBrk="0" hangingPunct="1">
+              <a:defRPr sz="1800" kern="1200">
+                <a:solidFill>
+                  <a:schemeClr val="lt1"/>
+                </a:solidFill>
+                <a:latin typeface="+mn-lt"/>
+                <a:ea typeface="+mn-ea"/>
+                <a:cs typeface="+mn-cs"/>
+              </a:defRPr>
+            </a:lvl4pPr>
+            <a:lvl5pPr marL="1828800" algn="l" defTabSz="914400" rtl="0" eaLnBrk="1" latinLnBrk="0" hangingPunct="1">
+              <a:defRPr sz="1800" kern="1200">
+                <a:solidFill>
+                  <a:schemeClr val="lt1"/>
+                </a:solidFill>
+                <a:latin typeface="+mn-lt"/>
+                <a:ea typeface="+mn-ea"/>
+                <a:cs typeface="+mn-cs"/>
+              </a:defRPr>
+            </a:lvl5pPr>
+            <a:lvl6pPr marL="2286000" algn="l" defTabSz="914400" rtl="0" eaLnBrk="1" latinLnBrk="0" hangingPunct="1">
+              <a:defRPr sz="1800" kern="1200">
+                <a:solidFill>
+                  <a:schemeClr val="lt1"/>
+                </a:solidFill>
+                <a:latin typeface="+mn-lt"/>
+                <a:ea typeface="+mn-ea"/>
+                <a:cs typeface="+mn-cs"/>
+              </a:defRPr>
+            </a:lvl6pPr>
+            <a:lvl7pPr marL="2743200" algn="l" defTabSz="914400" rtl="0" eaLnBrk="1" latinLnBrk="0" hangingPunct="1">
+              <a:defRPr sz="1800" kern="1200">
+                <a:solidFill>
+                  <a:schemeClr val="lt1"/>
+                </a:solidFill>
+                <a:latin typeface="+mn-lt"/>
+                <a:ea typeface="+mn-ea"/>
+                <a:cs typeface="+mn-cs"/>
+              </a:defRPr>
+            </a:lvl7pPr>
+            <a:lvl8pPr marL="3200400" algn="l" defTabSz="914400" rtl="0" eaLnBrk="1" latinLnBrk="0" hangingPunct="1">
+              <a:defRPr sz="1800" kern="1200">
+                <a:solidFill>
+                  <a:schemeClr val="lt1"/>
+                </a:solidFill>
+                <a:latin typeface="+mn-lt"/>
+                <a:ea typeface="+mn-ea"/>
+                <a:cs typeface="+mn-cs"/>
+              </a:defRPr>
+            </a:lvl8pPr>
+            <a:lvl9pPr marL="3657600" algn="l" defTabSz="914400" rtl="0" eaLnBrk="1" latinLnBrk="0" hangingPunct="1">
+              <a:defRPr sz="1800" kern="1200">
+                <a:solidFill>
+                  <a:schemeClr val="lt1"/>
+                </a:solidFill>
+                <a:latin typeface="+mn-lt"/>
+                <a:ea typeface="+mn-ea"/>
+                <a:cs typeface="+mn-cs"/>
+              </a:defRPr>
+            </a:lvl9pPr>
+          </a:lstStyle>
+          <a:p>
+            <a:pPr algn="ctr"/>
+            <a:endParaRPr lang="en-US"/>
+          </a:p>
+        </p:txBody>
+      </p:sp>
+      <p:sp>
+        <p:nvSpPr>
+          <p:cNvPr id="1033" name="Rectangle 1032">
+            <a:extLst>
+              <a:ext uri="{FF2B5EF4-FFF2-40B4-BE49-F238E27FC236}">
+                <a16:creationId xmlns:a16="http://schemas.microsoft.com/office/drawing/2014/main" id="{F9D95E49-763A-4886-B038-82F734740554}"/>
+              </a:ext>
+              <a:ext uri="{C183D7F6-B498-43B3-948B-1728B52AA6E4}">
+                <adec:decorative xmlns:adec="http://schemas.microsoft.com/office/drawing/2017/decorative" val="1"/>
+              </a:ext>
+            </a:extLst>
+          </p:cNvPr>
+          <p:cNvSpPr>
+            <a:spLocks noGrp="1" noRot="1" noChangeAspect="1" noMove="1" noResize="1" noEditPoints="1" noAdjustHandles="1" noChangeArrowheads="1" noChangeShapeType="1" noTextEdit="1"/>
+          </p:cNvSpPr>
+          <p:nvPr>
+            <p:extLst>
+              <p:ext uri="{386F3935-93C4-4BCD-93E2-E3B085C9AB24}">
+                <p16:designElem xmlns:p16="http://schemas.microsoft.com/office/powerpoint/2015/main" val="1"/>
+              </p:ext>
+            </p:extLst>
+          </p:nvPr>
+        </p:nvSpPr>
+        <p:spPr>
+          <a:xfrm>
+            <a:off x="1524" y="0"/>
+            <a:ext cx="12188952" cy="6858000"/>
+          </a:xfrm>
+          <a:prstGeom prst="rect">
+            <a:avLst/>
+          </a:prstGeom>
+          <a:solidFill>
+            <a:schemeClr val="bg2">
+              <a:alpha val="35000"/>
+            </a:schemeClr>
+          </a:solidFill>
+          <a:ln>
+            <a:noFill/>
+          </a:ln>
+        </p:spPr>
+        <p:style>
+          <a:lnRef idx="2">
+            <a:schemeClr val="accent1">
+              <a:shade val="50000"/>
+            </a:schemeClr>
+          </a:lnRef>
+          <a:fillRef idx="1">
+            <a:schemeClr val="accent1"/>
+          </a:fillRef>
+          <a:effectRef idx="0">
+            <a:schemeClr val="accent1"/>
+          </a:effectRef>
+          <a:fontRef idx="minor">
+            <a:schemeClr val="lt1"/>
+          </a:fontRef>
+        </p:style>
+        <p:txBody>
+          <a:bodyPr rtlCol="0" anchor="ctr"/>
+          <a:lstStyle>
+            <a:defPPr>
+              <a:defRPr lang="en-US"/>
+            </a:defPPr>
+            <a:lvl1pPr marL="0" algn="l" defTabSz="914400" rtl="0" eaLnBrk="1" latinLnBrk="0" hangingPunct="1">
+              <a:defRPr sz="1800" kern="1200">
+                <a:solidFill>
+                  <a:schemeClr val="lt1"/>
+                </a:solidFill>
+                <a:latin typeface="+mn-lt"/>
+                <a:ea typeface="+mn-ea"/>
+                <a:cs typeface="+mn-cs"/>
+              </a:defRPr>
+            </a:lvl1pPr>
+            <a:lvl2pPr marL="457200" algn="l" defTabSz="914400" rtl="0" eaLnBrk="1" latinLnBrk="0" hangingPunct="1">
+              <a:defRPr sz="1800" kern="1200">
+                <a:solidFill>
+                  <a:schemeClr val="lt1"/>
+                </a:solidFill>
+                <a:latin typeface="+mn-lt"/>
+                <a:ea typeface="+mn-ea"/>
+                <a:cs typeface="+mn-cs"/>
+              </a:defRPr>
+            </a:lvl2pPr>
+            <a:lvl3pPr marL="914400" algn="l" defTabSz="914400" rtl="0" eaLnBrk="1" latinLnBrk="0" hangingPunct="1">
+              <a:defRPr sz="1800" kern="1200">
+                <a:solidFill>
+                  <a:schemeClr val="lt1"/>
+                </a:solidFill>
+                <a:latin typeface="+mn-lt"/>
+                <a:ea typeface="+mn-ea"/>
+                <a:cs typeface="+mn-cs"/>
+              </a:defRPr>
+            </a:lvl3pPr>
+            <a:lvl4pPr marL="1371600" algn="l" defTabSz="914400" rtl="0" eaLnBrk="1" latinLnBrk="0" hangingPunct="1">
+              <a:defRPr sz="1800" kern="1200">
+                <a:solidFill>
+                  <a:schemeClr val="lt1"/>
+                </a:solidFill>
+                <a:latin typeface="+mn-lt"/>
+                <a:ea typeface="+mn-ea"/>
+                <a:cs typeface="+mn-cs"/>
+              </a:defRPr>
+            </a:lvl4pPr>
+            <a:lvl5pPr marL="1828800" algn="l" defTabSz="914400" rtl="0" eaLnBrk="1" latinLnBrk="0" hangingPunct="1">
+              <a:defRPr sz="1800" kern="1200">
+                <a:solidFill>
+                  <a:schemeClr val="lt1"/>
+                </a:solidFill>
+                <a:latin typeface="+mn-lt"/>
+                <a:ea typeface="+mn-ea"/>
+                <a:cs typeface="+mn-cs"/>
+              </a:defRPr>
+            </a:lvl5pPr>
+            <a:lvl6pPr marL="2286000" algn="l" defTabSz="914400" rtl="0" eaLnBrk="1" latinLnBrk="0" hangingPunct="1">
+              <a:defRPr sz="1800" kern="1200">
+                <a:solidFill>
+                  <a:schemeClr val="lt1"/>
+                </a:solidFill>
+                <a:latin typeface="+mn-lt"/>
+                <a:ea typeface="+mn-ea"/>
+                <a:cs typeface="+mn-cs"/>
+              </a:defRPr>
+            </a:lvl6pPr>
+            <a:lvl7pPr marL="2743200" algn="l" defTabSz="914400" rtl="0" eaLnBrk="1" latinLnBrk="0" hangingPunct="1">
+              <a:defRPr sz="1800" kern="1200">
+                <a:solidFill>
+                  <a:schemeClr val="lt1"/>
+                </a:solidFill>
+                <a:latin typeface="+mn-lt"/>
+                <a:ea typeface="+mn-ea"/>
+                <a:cs typeface="+mn-cs"/>
+              </a:defRPr>
+            </a:lvl7pPr>
+            <a:lvl8pPr marL="3200400" algn="l" defTabSz="914400" rtl="0" eaLnBrk="1" latinLnBrk="0" hangingPunct="1">
+              <a:defRPr sz="1800" kern="1200">
+                <a:solidFill>
+                  <a:schemeClr val="lt1"/>
+                </a:solidFill>
+                <a:latin typeface="+mn-lt"/>
+                <a:ea typeface="+mn-ea"/>
+                <a:cs typeface="+mn-cs"/>
+              </a:defRPr>
+            </a:lvl8pPr>
+            <a:lvl9pPr marL="3657600" algn="l" defTabSz="914400" rtl="0" eaLnBrk="1" latinLnBrk="0" hangingPunct="1">
+              <a:defRPr sz="1800" kern="1200">
+                <a:solidFill>
+                  <a:schemeClr val="lt1"/>
+                </a:solidFill>
+                <a:latin typeface="+mn-lt"/>
+                <a:ea typeface="+mn-ea"/>
+                <a:cs typeface="+mn-cs"/>
+              </a:defRPr>
+            </a:lvl9pPr>
+          </a:lstStyle>
+          <a:p>
+            <a:pPr algn="ctr"/>
+            <a:endParaRPr lang="en-US"/>
+          </a:p>
+        </p:txBody>
+      </p:sp>
+      <p:sp>
+        <p:nvSpPr>
+          <p:cNvPr id="1035" name="Rectangle 1034">
+            <a:extLst>
+              <a:ext uri="{FF2B5EF4-FFF2-40B4-BE49-F238E27FC236}">
+                <a16:creationId xmlns:a16="http://schemas.microsoft.com/office/drawing/2014/main" id="{1335D9B3-B2C5-40E1-BFF9-E01D0DB42474}"/>
+              </a:ext>
+              <a:ext uri="{C183D7F6-B498-43B3-948B-1728B52AA6E4}">
+                <adec:decorative xmlns:adec="http://schemas.microsoft.com/office/drawing/2017/decorative" val="1"/>
+              </a:ext>
+            </a:extLst>
+          </p:cNvPr>
+          <p:cNvSpPr>
+            <a:spLocks noGrp="1" noRot="1" noChangeAspect="1" noMove="1" noResize="1" noEditPoints="1" noAdjustHandles="1" noChangeArrowheads="1" noChangeShapeType="1" noTextEdit="1"/>
+          </p:cNvSpPr>
+          <p:nvPr>
+            <p:extLst>
+              <p:ext uri="{386F3935-93C4-4BCD-93E2-E3B085C9AB24}">
+                <p16:designElem xmlns:p16="http://schemas.microsoft.com/office/powerpoint/2015/main" val="1"/>
+              </p:ext>
+            </p:extLst>
+          </p:nvPr>
+        </p:nvSpPr>
+        <p:spPr>
+          <a:xfrm>
+            <a:off x="1478324" y="699899"/>
+            <a:ext cx="10713676" cy="5433318"/>
+          </a:xfrm>
+          <a:prstGeom prst="rect">
+            <a:avLst/>
+          </a:prstGeom>
+          <a:solidFill>
+            <a:schemeClr val="bg1"/>
+          </a:solidFill>
+          <a:ln>
+            <a:noFill/>
+          </a:ln>
+        </p:spPr>
+        <p:style>
+          <a:lnRef idx="2">
+            <a:schemeClr val="accent1">
+              <a:shade val="50000"/>
+            </a:schemeClr>
+          </a:lnRef>
+          <a:fillRef idx="1">
+            <a:schemeClr val="accent1"/>
+          </a:fillRef>
+          <a:effectRef idx="0">
+            <a:schemeClr val="accent1"/>
+          </a:effectRef>
+          <a:fontRef idx="minor">
+            <a:schemeClr val="lt1"/>
+          </a:fontRef>
+        </p:style>
+        <p:txBody>
+          <a:bodyPr rtlCol="0" anchor="ctr"/>
+          <a:lstStyle/>
+          <a:p>
+            <a:pPr algn="ctr"/>
+            <a:endParaRPr lang="en-US"/>
+          </a:p>
+        </p:txBody>
+      </p:sp>
+      <p:sp>
+        <p:nvSpPr>
           <p:cNvPr id="2" name="Title 1">
             <a:extLst>
               <a:ext uri="{FF2B5EF4-FFF2-40B4-BE49-F238E27FC236}">
@@ -11292,15 +11717,72 @@
             <p:ph type="title"/>
           </p:nvPr>
         </p:nvSpPr>
-        <p:spPr/>
+        <p:spPr>
+          <a:xfrm>
+            <a:off x="422900" y="540167"/>
+            <a:ext cx="4028783" cy="2135867"/>
+          </a:xfrm>
+        </p:spPr>
         <p:txBody>
-          <a:bodyPr/>
+          <a:bodyPr anchor="b">
+            <a:normAutofit/>
+          </a:bodyPr>
           <a:lstStyle/>
           <a:p>
             <a:r>
-              <a:rPr lang="en-US" dirty="0"/>
+              <a:rPr lang="en-US" sz="4800">
+                <a:solidFill>
+                  <a:schemeClr val="tx1"/>
+                </a:solidFill>
+              </a:rPr>
               <a:t>Method - Datasets</a:t>
             </a:r>
+          </a:p>
+        </p:txBody>
+      </p:sp>
+      <p:sp>
+        <p:nvSpPr>
+          <p:cNvPr id="6" name="Slide Number Placeholder 5">
+            <a:extLst>
+              <a:ext uri="{FF2B5EF4-FFF2-40B4-BE49-F238E27FC236}">
+                <a16:creationId xmlns:a16="http://schemas.microsoft.com/office/drawing/2014/main" id="{0211B4D9-C5C7-1994-50D8-F1B0B662A823}"/>
+              </a:ext>
+            </a:extLst>
+          </p:cNvPr>
+          <p:cNvSpPr>
+            <a:spLocks noGrp="1"/>
+          </p:cNvSpPr>
+          <p:nvPr>
+            <p:ph type="sldNum" sz="quarter" idx="12"/>
+          </p:nvPr>
+        </p:nvSpPr>
+        <p:spPr>
+          <a:xfrm>
+            <a:off x="11503152" y="-18288"/>
+            <a:ext cx="685800" cy="685800"/>
+          </a:xfrm>
+        </p:spPr>
+        <p:txBody>
+          <a:bodyPr>
+            <a:normAutofit/>
+          </a:bodyPr>
+          <a:lstStyle/>
+          <a:p>
+            <a:pPr>
+              <a:spcAft>
+                <a:spcPts val="600"/>
+              </a:spcAft>
+            </a:pPr>
+            <a:fld id="{7BE69E03-4804-4553-A1EC-F089884EF50F}" type="slidenum">
+              <a:rPr lang="en-US" smtClean="0"/>
+              <a:pPr>
+                <a:spcAft>
+                  <a:spcPts val="600"/>
+                </a:spcAft>
+              </a:pPr>
+              <a:t>6</a:t>
+            </a:fld>
+            <a:endParaRPr lang="en-US"/>
           </a:p>
         </p:txBody>
       </p:sp>
@@ -11320,46 +11802,180 @@
             <p:ph idx="1"/>
           </p:nvPr>
         </p:nvSpPr>
-        <p:spPr/>
+        <p:spPr>
+          <a:xfrm>
+            <a:off x="422900" y="2880452"/>
+            <a:ext cx="4028783" cy="3095445"/>
+          </a:xfrm>
+        </p:spPr>
         <p:txBody>
-          <a:bodyPr/>
+          <a:bodyPr anchor="t">
+            <a:normAutofit/>
+          </a:bodyPr>
           <a:lstStyle/>
           <a:p>
-            <a:r>
-              <a:rPr lang="en-US" dirty="0"/>
-              <a:t>FFHQ </a:t>
-            </a:r>
-            <a:r>
-              <a:rPr lang="en-US" dirty="0" err="1"/>
-              <a:t>Synthic</a:t>
-            </a:r>
-            <a:r>
-              <a:rPr lang="en-US" dirty="0"/>
-              <a:t> everyday makeup</a:t>
-            </a:r>
-          </a:p>
-          <a:p>
-            <a:r>
-              <a:rPr lang="en-US" dirty="0"/>
-              <a:t>LADN </a:t>
-            </a:r>
-            <a:r>
-              <a:rPr lang="en-US" dirty="0" err="1"/>
-              <a:t>Syntethic</a:t>
-            </a:r>
-            <a:r>
-              <a:rPr lang="en-US" dirty="0"/>
-              <a:t> extreme makeup</a:t>
-            </a:r>
-          </a:p>
-          <a:p>
-            <a:r>
-              <a:rPr lang="en-US" dirty="0" err="1"/>
-              <a:t>Miniset</a:t>
-            </a:r>
-            <a:r>
-              <a:rPr lang="en-US" dirty="0"/>
-              <a:t> natural makeup</a:t>
+            <a:pPr>
+              <a:lnSpc>
+                <a:spcPct val="90000"/>
+              </a:lnSpc>
+            </a:pPr>
+            <a:r>
+              <a:rPr lang="en-US" sz="1400">
+                <a:solidFill>
+                  <a:schemeClr val="tx1"/>
+                </a:solidFill>
+              </a:rPr>
+              <a:t>UTKFace</a:t>
+            </a:r>
+          </a:p>
+          <a:p>
+            <a:pPr>
+              <a:lnSpc>
+                <a:spcPct val="90000"/>
+              </a:lnSpc>
+            </a:pPr>
+            <a:r>
+              <a:rPr lang="en-US" sz="1400">
+                <a:solidFill>
+                  <a:schemeClr val="tx1"/>
+                </a:solidFill>
+              </a:rPr>
+              <a:t>FFHQ Synthetic everyday makeup</a:t>
+            </a:r>
+          </a:p>
+          <a:p>
+            <a:pPr lvl="1">
+              <a:lnSpc>
+                <a:spcPct val="90000"/>
+              </a:lnSpc>
+            </a:pPr>
+            <a:r>
+              <a:rPr lang="en-US" sz="1400">
+                <a:solidFill>
+                  <a:schemeClr val="tx1"/>
+                </a:solidFill>
+              </a:rPr>
+              <a:t>Light makeup</a:t>
+            </a:r>
+          </a:p>
+          <a:p>
+            <a:pPr lvl="1">
+              <a:lnSpc>
+                <a:spcPct val="90000"/>
+              </a:lnSpc>
+            </a:pPr>
+            <a:r>
+              <a:rPr lang="en-US" sz="1400">
+                <a:solidFill>
+                  <a:schemeClr val="tx1"/>
+                </a:solidFill>
+              </a:rPr>
+              <a:t>Highlighting existing features</a:t>
+            </a:r>
+          </a:p>
+          <a:p>
+            <a:pPr>
+              <a:lnSpc>
+                <a:spcPct val="90000"/>
+              </a:lnSpc>
+            </a:pPr>
+            <a:r>
+              <a:rPr lang="en-US" sz="1400">
+                <a:solidFill>
+                  <a:schemeClr val="tx1"/>
+                </a:solidFill>
+              </a:rPr>
+              <a:t>LADN Synthetic extreme makeup</a:t>
+            </a:r>
+          </a:p>
+          <a:p>
+            <a:pPr lvl="1">
+              <a:lnSpc>
+                <a:spcPct val="90000"/>
+              </a:lnSpc>
+            </a:pPr>
+            <a:r>
+              <a:rPr lang="en-US" sz="1400">
+                <a:solidFill>
+                  <a:schemeClr val="tx1"/>
+                </a:solidFill>
+              </a:rPr>
+              <a:t>Bright color changes</a:t>
+            </a:r>
+          </a:p>
+          <a:p>
+            <a:pPr lvl="1">
+              <a:lnSpc>
+                <a:spcPct val="90000"/>
+              </a:lnSpc>
+            </a:pPr>
+            <a:r>
+              <a:rPr lang="en-US" sz="1400">
+                <a:solidFill>
+                  <a:schemeClr val="tx1"/>
+                </a:solidFill>
+              </a:rPr>
+              <a:t>Hiding landmarks</a:t>
+            </a:r>
+          </a:p>
+          <a:p>
+            <a:pPr lvl="1">
+              <a:lnSpc>
+                <a:spcPct val="90000"/>
+              </a:lnSpc>
+            </a:pPr>
+            <a:r>
+              <a:rPr lang="en-US" sz="1400">
+                <a:solidFill>
+                  <a:schemeClr val="tx1"/>
+                </a:solidFill>
+              </a:rPr>
+              <a:t>Intense smoothing</a:t>
+            </a:r>
+          </a:p>
+          <a:p>
+            <a:pPr>
+              <a:lnSpc>
+                <a:spcPct val="90000"/>
+              </a:lnSpc>
+            </a:pPr>
+            <a:r>
+              <a:rPr lang="en-US" sz="1400">
+                <a:solidFill>
+                  <a:schemeClr val="tx1"/>
+                </a:solidFill>
+              </a:rPr>
+              <a:t>Mini set natural makeup</a:t>
+            </a:r>
+          </a:p>
+          <a:p>
+            <a:pPr lvl="1">
+              <a:lnSpc>
+                <a:spcPct val="90000"/>
+              </a:lnSpc>
+            </a:pPr>
+            <a:r>
+              <a:rPr lang="en-US" sz="1400">
+                <a:solidFill>
+                  <a:schemeClr val="tx1"/>
+                </a:solidFill>
+              </a:rPr>
+              <a:t>Before &amp; After</a:t>
+            </a:r>
+          </a:p>
+          <a:p>
+            <a:pPr lvl="1">
+              <a:lnSpc>
+                <a:spcPct val="90000"/>
+              </a:lnSpc>
+            </a:pPr>
+            <a:r>
+              <a:rPr lang="en-US" sz="1400">
+                <a:solidFill>
+                  <a:schemeClr val="tx1"/>
+                </a:solidFill>
+              </a:rPr>
+              <a:t>More noise</a:t>
             </a:r>
           </a:p>
         </p:txBody>
@@ -11380,21 +11996,179 @@
             <p:ph type="dt" sz="half" idx="10"/>
           </p:nvPr>
         </p:nvSpPr>
-        <p:spPr/>
+        <p:spPr>
+          <a:xfrm>
+            <a:off x="422898" y="6217920"/>
+            <a:ext cx="2743200" cy="640080"/>
+          </a:xfrm>
+        </p:spPr>
         <p:txBody>
-          <a:bodyPr/>
+          <a:bodyPr>
+            <a:normAutofit/>
+          </a:bodyPr>
           <a:lstStyle/>
           <a:p>
+            <a:pPr>
+              <a:spcAft>
+                <a:spcPts val="600"/>
+              </a:spcAft>
+            </a:pPr>
             <a:fld id="{57997BA6-BEF8-495F-ACCD-8D19769E4FC6}" type="datetime2">
               <a:rPr lang="en-US" smtClean="0"/>
+              <a:pPr>
+                <a:spcAft>
+                  <a:spcPts val="600"/>
+                </a:spcAft>
+              </a:pPr>
               <a:t>Friday, October 17, 2025</a:t>
             </a:fld>
-            <a:endParaRPr lang="en-US" dirty="0"/>
+            <a:endParaRPr lang="en-US"/>
           </a:p>
         </p:txBody>
       </p:sp>
       <p:sp>
         <p:nvSpPr>
+          <p:cNvPr id="1037" name="Rectangle 1036">
+            <a:extLst>
+              <a:ext uri="{FF2B5EF4-FFF2-40B4-BE49-F238E27FC236}">
+                <a16:creationId xmlns:a16="http://schemas.microsoft.com/office/drawing/2014/main" id="{6D95061B-ADFC-4592-8BB1-0D542F6F6436}"/>
+              </a:ext>
+              <a:ext uri="{C183D7F6-B498-43B3-948B-1728B52AA6E4}">
+                <adec:decorative xmlns:adec="http://schemas.microsoft.com/office/drawing/2017/decorative" val="1"/>
+              </a:ext>
+            </a:extLst>
+          </p:cNvPr>
+          <p:cNvSpPr>
+            <a:spLocks noGrp="1" noRot="1" noChangeAspect="1" noMove="1" noResize="1" noEditPoints="1" noAdjustHandles="1" noChangeArrowheads="1" noChangeShapeType="1" noTextEdit="1"/>
+          </p:cNvSpPr>
+          <p:nvPr>
+            <p:extLst>
+              <p:ext uri="{386F3935-93C4-4BCD-93E2-E3B085C9AB24}">
+                <p16:designElem xmlns:p16="http://schemas.microsoft.com/office/powerpoint/2015/main" val="1"/>
+              </p:ext>
+            </p:extLst>
+          </p:nvPr>
+        </p:nvSpPr>
+        <p:spPr>
+          <a:xfrm rot="10800000">
+            <a:off x="5042523" y="6081915"/>
+            <a:ext cx="6460098" cy="781696"/>
+          </a:xfrm>
+          <a:prstGeom prst="rect">
+            <a:avLst/>
+          </a:prstGeom>
+          <a:solidFill>
+            <a:schemeClr val="accent1">
+              <a:alpha val="25000"/>
+            </a:schemeClr>
+          </a:solidFill>
+          <a:ln w="25400" cap="flat">
+            <a:noFill/>
+            <a:prstDash val="solid"/>
+            <a:round/>
+          </a:ln>
+          <a:effectLst/>
+          <a:sp3d/>
+        </p:spPr>
+        <p:style>
+          <a:lnRef idx="0">
+            <a:scrgbClr r="0" g="0" b="0"/>
+          </a:lnRef>
+          <a:fillRef idx="0">
+            <a:scrgbClr r="0" g="0" b="0"/>
+          </a:fillRef>
+          <a:effectRef idx="0">
+            <a:scrgbClr r="0" g="0" b="0"/>
+          </a:effectRef>
+          <a:fontRef idx="none"/>
+        </p:style>
+        <p:txBody>
+          <a:bodyPr rot="0" spcFirstLastPara="1" vertOverflow="overflow" horzOverflow="overflow" vert="horz" wrap="square" lIns="0" tIns="0" rIns="0" bIns="0" numCol="1" spcCol="38100" rtlCol="0" anchor="ctr">
+            <a:spAutoFit/>
+          </a:bodyPr>
+          <a:lstStyle/>
+          <a:p>
+            <a:pPr marL="0" marR="0" indent="0" algn="ctr" defTabSz="825500" rtl="0" fontAlgn="auto" latinLnBrk="0" hangingPunct="0">
+              <a:lnSpc>
+                <a:spcPct val="100000"/>
+              </a:lnSpc>
+              <a:spcBef>
+                <a:spcPts val="0"/>
+              </a:spcBef>
+              <a:spcAft>
+                <a:spcPts val="0"/>
+              </a:spcAft>
+              <a:buClrTx/>
+              <a:buSzTx/>
+              <a:buFontTx/>
+              <a:buNone/>
+              <a:tabLst/>
+            </a:pPr>
+            <a:endParaRPr kumimoji="0" lang="en-US" sz="3000" b="0" i="0" u="none" strike="noStrike" cap="none" spc="0" normalizeH="0" baseline="0">
+              <a:ln>
+                <a:noFill/>
+              </a:ln>
+              <a:solidFill>
+                <a:srgbClr val="000000"/>
+              </a:solidFill>
+              <a:effectLst/>
+              <a:uFillTx/>
+              <a:latin typeface="Helvetica Neue Medium"/>
+              <a:ea typeface="Helvetica Neue Medium"/>
+              <a:cs typeface="Helvetica Neue Medium"/>
+              <a:sym typeface="Helvetica Neue Medium"/>
+            </a:endParaRPr>
+          </a:p>
+        </p:txBody>
+      </p:sp>
+      <p:pic>
+        <p:nvPicPr>
+          <p:cNvPr id="1026" name="Picture 2" descr="The normal distribution HOG of UTKFace dataset representation">
+            <a:extLst>
+              <a:ext uri="{FF2B5EF4-FFF2-40B4-BE49-F238E27FC236}">
+                <a16:creationId xmlns:a16="http://schemas.microsoft.com/office/drawing/2014/main" id="{71BB6896-9F1E-D676-5706-F00B72B58C73}"/>
+              </a:ext>
+            </a:extLst>
+          </p:cNvPr>
+          <p:cNvPicPr>
+            <a:picLocks noChangeAspect="1" noChangeArrowheads="1"/>
+          </p:cNvPicPr>
+          <p:nvPr/>
+        </p:nvPicPr>
+        <p:blipFill>
+          <a:blip r:embed="rId2">
+            <a:extLst>
+              <a:ext uri="{28A0092B-C50C-407E-A947-70E740481C1C}">
+                <a14:useLocalDpi xmlns:a14="http://schemas.microsoft.com/office/drawing/2010/main" val="0"/>
+              </a:ext>
+            </a:extLst>
+          </a:blip>
+          <a:stretch>
+            <a:fillRect/>
+          </a:stretch>
+        </p:blipFill>
+        <p:spPr bwMode="auto">
+          <a:xfrm>
+            <a:off x="5036801" y="1511612"/>
+            <a:ext cx="6460089" cy="4651267"/>
+          </a:xfrm>
+          <a:prstGeom prst="rect">
+            <a:avLst/>
+          </a:prstGeom>
+          <a:noFill/>
+          <a:extLst>
+            <a:ext uri="{909E8E84-426E-40DD-AFC4-6F175D3DCCD1}">
+              <a14:hiddenFill xmlns:a14="http://schemas.microsoft.com/office/drawing/2010/main">
+                <a:solidFill>
+                  <a:srgbClr val="FFFFFF"/>
+                </a:solidFill>
+              </a14:hiddenFill>
+            </a:ext>
+          </a:extLst>
+        </p:spPr>
+      </p:pic>
+      <p:sp>
+        <p:nvSpPr>
           <p:cNvPr id="5" name="Footer Placeholder 4">
             <a:extLst>
               <a:ext uri="{FF2B5EF4-FFF2-40B4-BE49-F238E27FC236}">
@@ -11409,48 +12183,136 @@
             <p:ph type="ftr" sz="quarter" idx="11"/>
           </p:nvPr>
         </p:nvSpPr>
-        <p:spPr/>
+        <p:spPr>
+          <a:xfrm>
+            <a:off x="3767328" y="6217920"/>
+            <a:ext cx="7196328" cy="640080"/>
+          </a:xfrm>
+        </p:spPr>
         <p:txBody>
-          <a:bodyPr/>
+          <a:bodyPr>
+            <a:normAutofit/>
+          </a:bodyPr>
           <a:lstStyle/>
           <a:p>
+            <a:pPr>
+              <a:spcAft>
+                <a:spcPts val="600"/>
+              </a:spcAft>
+            </a:pPr>
             <a:r>
               <a:rPr lang="en-US"/>
               <a:t>Sample Footer Text</a:t>
             </a:r>
-            <a:endParaRPr lang="en-US" dirty="0"/>
           </a:p>
         </p:txBody>
       </p:sp>
-      <p:sp>
-        <p:nvSpPr>
-          <p:cNvPr id="6" name="Slide Number Placeholder 5">
-            <a:extLst>
-              <a:ext uri="{FF2B5EF4-FFF2-40B4-BE49-F238E27FC236}">
-                <a16:creationId xmlns:a16="http://schemas.microsoft.com/office/drawing/2014/main" id="{0211B4D9-C5C7-1994-50D8-F1B0B662A823}"/>
-              </a:ext>
-            </a:extLst>
-          </p:cNvPr>
-          <p:cNvSpPr>
-            <a:spLocks noGrp="1"/>
-          </p:cNvSpPr>
-          <p:nvPr>
-            <p:ph type="sldNum" sz="quarter" idx="12"/>
-          </p:nvPr>
-        </p:nvSpPr>
-        <p:spPr/>
-        <p:txBody>
-          <a:bodyPr/>
-          <a:lstStyle/>
-          <a:p>
-            <a:fld id="{7BE69E03-4804-4553-A1EC-F089884EF50F}" type="slidenum">
-              <a:rPr lang="en-US" smtClean="0"/>
-              <a:t>6</a:t>
-            </a:fld>
-            <a:endParaRPr lang="en-US"/>
-          </a:p>
-        </p:txBody>
-      </p:sp>
+      <p:cxnSp>
+        <p:nvCxnSpPr>
+          <p:cNvPr id="1039" name="Straight Connector 1038">
+            <a:extLst>
+              <a:ext uri="{FF2B5EF4-FFF2-40B4-BE49-F238E27FC236}">
+                <a16:creationId xmlns:a16="http://schemas.microsoft.com/office/drawing/2014/main" id="{2B67C3E3-D148-40AD-9F4C-431AA28ACA66}"/>
+              </a:ext>
+              <a:ext uri="{C183D7F6-B498-43B3-948B-1728B52AA6E4}">
+                <adec:decorative xmlns:adec="http://schemas.microsoft.com/office/drawing/2017/decorative" val="1"/>
+              </a:ext>
+            </a:extLst>
+          </p:cNvPr>
+          <p:cNvCxnSpPr>
+            <a:cxnSpLocks noGrp="1" noRot="1" noChangeAspect="1" noMove="1" noResize="1" noEditPoints="1" noAdjustHandles="1" noChangeArrowheads="1" noChangeShapeType="1"/>
+          </p:cNvCxnSpPr>
+          <p:nvPr>
+            <p:extLst>
+              <p:ext uri="{386F3935-93C4-4BCD-93E2-E3B085C9AB24}">
+                <p16:designElem xmlns:p16="http://schemas.microsoft.com/office/powerpoint/2015/main" val="1"/>
+              </p:ext>
+            </p:extLst>
+          </p:nvPr>
+        </p:nvCxnSpPr>
+        <p:spPr>
+          <a:xfrm flipV="1">
+            <a:off x="11496184" y="5610"/>
+            <a:ext cx="0" cy="6858000"/>
+          </a:xfrm>
+          <a:prstGeom prst="line">
+            <a:avLst/>
+          </a:prstGeom>
+          <a:ln w="9525" cap="rnd">
+            <a:solidFill>
+              <a:srgbClr val="268DD4"/>
+            </a:solidFill>
+            <a:prstDash val="dash"/>
+          </a:ln>
+        </p:spPr>
+        <p:style>
+          <a:lnRef idx="1">
+            <a:schemeClr val="accent1"/>
+          </a:lnRef>
+          <a:fillRef idx="0">
+            <a:schemeClr val="accent1"/>
+          </a:fillRef>
+          <a:effectRef idx="0">
+            <a:schemeClr val="accent1"/>
+          </a:effectRef>
+          <a:fontRef idx="minor">
+            <a:schemeClr val="tx1"/>
+          </a:fontRef>
+        </p:style>
+      </p:cxnSp>
+      <p:cxnSp>
+        <p:nvCxnSpPr>
+          <p:cNvPr id="1041" name="Straight Connector 1040">
+            <a:extLst>
+              <a:ext uri="{FF2B5EF4-FFF2-40B4-BE49-F238E27FC236}">
+                <a16:creationId xmlns:a16="http://schemas.microsoft.com/office/drawing/2014/main" id="{C30DD030-ACB5-4C2C-AD03-51D52E277DEB}"/>
+              </a:ext>
+              <a:ext uri="{C183D7F6-B498-43B3-948B-1728B52AA6E4}">
+                <adec:decorative xmlns:adec="http://schemas.microsoft.com/office/drawing/2017/decorative" val="1"/>
+              </a:ext>
+            </a:extLst>
+          </p:cNvPr>
+          <p:cNvCxnSpPr>
+            <a:cxnSpLocks noGrp="1" noRot="1" noChangeAspect="1" noMove="1" noResize="1" noEditPoints="1" noAdjustHandles="1" noChangeArrowheads="1" noChangeShapeType="1"/>
+          </p:cNvCxnSpPr>
+          <p:nvPr>
+            <p:extLst>
+              <p:ext uri="{386F3935-93C4-4BCD-93E2-E3B085C9AB24}">
+                <p16:designElem xmlns:p16="http://schemas.microsoft.com/office/powerpoint/2015/main" val="1"/>
+              </p:ext>
+            </p:extLst>
+          </p:nvPr>
+        </p:nvCxnSpPr>
+        <p:spPr>
+          <a:xfrm>
+            <a:off x="1524" y="6172200"/>
+            <a:ext cx="12192000" cy="0"/>
+          </a:xfrm>
+          <a:prstGeom prst="line">
+            <a:avLst/>
+          </a:prstGeom>
+          <a:ln w="9525" cap="rnd">
+            <a:solidFill>
+              <a:srgbClr val="268DD4"/>
+            </a:solidFill>
+            <a:prstDash val="dash"/>
+          </a:ln>
+        </p:spPr>
+        <p:style>
+          <a:lnRef idx="1">
+            <a:schemeClr val="accent1"/>
+          </a:lnRef>
+          <a:fillRef idx="0">
+            <a:schemeClr val="accent1"/>
+          </a:fillRef>
+          <a:effectRef idx="0">
+            <a:schemeClr val="accent1"/>
+          </a:effectRef>
+          <a:fontRef idx="minor">
+            <a:schemeClr val="tx1"/>
+          </a:fontRef>
+        </p:style>
+      </p:cxnSp>
     </p:spTree>
     <p:extLst>
       <p:ext uri="{BB962C8B-B14F-4D97-AF65-F5344CB8AC3E}">
@@ -11811,874 +12673,6 @@
           </a:prstGeom>
         </p:spPr>
       </p:pic>
-      <p:sp>
-        <p:nvSpPr>
-          <p:cNvPr id="27" name="Content Placeholder 2">
-            <a:extLst>
-              <a:ext uri="{FF2B5EF4-FFF2-40B4-BE49-F238E27FC236}">
-                <a16:creationId xmlns:a16="http://schemas.microsoft.com/office/drawing/2014/main" id="{A7C747A0-9260-975D-A429-7390CB3EA010}"/>
-              </a:ext>
-            </a:extLst>
-          </p:cNvPr>
-          <p:cNvSpPr txBox="1">
-            <a:spLocks/>
-          </p:cNvSpPr>
-          <p:nvPr/>
-        </p:nvSpPr>
-        <p:spPr>
-          <a:xfrm>
-            <a:off x="450228" y="3416845"/>
-            <a:ext cx="1739633" cy="349398"/>
-          </a:xfrm>
-          <a:prstGeom prst="rect">
-            <a:avLst/>
-          </a:prstGeom>
-        </p:spPr>
-        <p:txBody>
-          <a:bodyPr vert="horz" lIns="91440" tIns="45720" rIns="91440" bIns="45720" rtlCol="0">
-            <a:normAutofit fontScale="92500" lnSpcReduction="10000"/>
-          </a:bodyPr>
-          <a:lstStyle>
-            <a:lvl1pPr marL="228600" indent="-228600" algn="l" defTabSz="914400" rtl="0" eaLnBrk="1" latinLnBrk="0" hangingPunct="1">
-              <a:lnSpc>
-                <a:spcPct val="100000"/>
-              </a:lnSpc>
-              <a:spcBef>
-                <a:spcPts val="1000"/>
-              </a:spcBef>
-              <a:buClr>
-                <a:schemeClr val="accent2"/>
-              </a:buClr>
-              <a:buFont typeface="Wingdings 2" panose="05020102010507070707" pitchFamily="18" charset="2"/>
-              <a:buChar char=""/>
-              <a:defRPr sz="2400" kern="1200">
-                <a:solidFill>
-                  <a:schemeClr val="tx2"/>
-                </a:solidFill>
-                <a:latin typeface="+mn-lt"/>
-                <a:ea typeface="+mn-ea"/>
-                <a:cs typeface="+mn-cs"/>
-              </a:defRPr>
-            </a:lvl1pPr>
-            <a:lvl2pPr marL="685800" indent="-228600" algn="l" defTabSz="914400" rtl="0" eaLnBrk="1" latinLnBrk="0" hangingPunct="1">
-              <a:lnSpc>
-                <a:spcPct val="100000"/>
-              </a:lnSpc>
-              <a:spcBef>
-                <a:spcPts val="500"/>
-              </a:spcBef>
-              <a:buClr>
-                <a:schemeClr val="accent2"/>
-              </a:buClr>
-              <a:buFont typeface="Wingdings 2" panose="05020102010507070707" pitchFamily="18" charset="2"/>
-              <a:buChar char=""/>
-              <a:defRPr sz="2200" kern="1200">
-                <a:solidFill>
-                  <a:schemeClr val="tx2"/>
-                </a:solidFill>
-                <a:latin typeface="+mn-lt"/>
-                <a:ea typeface="+mn-ea"/>
-                <a:cs typeface="+mn-cs"/>
-              </a:defRPr>
-            </a:lvl2pPr>
-            <a:lvl3pPr marL="1143000" indent="-228600" algn="l" defTabSz="914400" rtl="0" eaLnBrk="1" latinLnBrk="0" hangingPunct="1">
-              <a:lnSpc>
-                <a:spcPct val="100000"/>
-              </a:lnSpc>
-              <a:spcBef>
-                <a:spcPts val="500"/>
-              </a:spcBef>
-              <a:buClr>
-                <a:schemeClr val="accent2"/>
-              </a:buClr>
-              <a:buFont typeface="Wingdings 2" panose="05020102010507070707" pitchFamily="18" charset="2"/>
-              <a:buChar char=""/>
-              <a:defRPr sz="1800" kern="1200">
-                <a:solidFill>
-                  <a:schemeClr val="tx2"/>
-                </a:solidFill>
-                <a:latin typeface="+mn-lt"/>
-                <a:ea typeface="+mn-ea"/>
-                <a:cs typeface="+mn-cs"/>
-              </a:defRPr>
-            </a:lvl3pPr>
-            <a:lvl4pPr marL="1600200" indent="-228600" algn="l" defTabSz="914400" rtl="0" eaLnBrk="1" latinLnBrk="0" hangingPunct="1">
-              <a:lnSpc>
-                <a:spcPct val="100000"/>
-              </a:lnSpc>
-              <a:spcBef>
-                <a:spcPts val="500"/>
-              </a:spcBef>
-              <a:buClr>
-                <a:schemeClr val="accent2"/>
-              </a:buClr>
-              <a:buFont typeface="Wingdings 2" panose="05020102010507070707" pitchFamily="18" charset="2"/>
-              <a:buChar char=""/>
-              <a:defRPr sz="1600" kern="1200">
-                <a:solidFill>
-                  <a:schemeClr val="tx2"/>
-                </a:solidFill>
-                <a:latin typeface="+mn-lt"/>
-                <a:ea typeface="+mn-ea"/>
-                <a:cs typeface="+mn-cs"/>
-              </a:defRPr>
-            </a:lvl4pPr>
-            <a:lvl5pPr marL="2057400" indent="-228600" algn="l" defTabSz="914400" rtl="0" eaLnBrk="1" latinLnBrk="0" hangingPunct="1">
-              <a:lnSpc>
-                <a:spcPct val="100000"/>
-              </a:lnSpc>
-              <a:spcBef>
-                <a:spcPts val="500"/>
-              </a:spcBef>
-              <a:buClr>
-                <a:schemeClr val="accent2"/>
-              </a:buClr>
-              <a:buFont typeface="Wingdings 2" panose="05020102010507070707" pitchFamily="18" charset="2"/>
-              <a:buChar char=""/>
-              <a:defRPr sz="1400" kern="1200">
-                <a:solidFill>
-                  <a:schemeClr val="tx2"/>
-                </a:solidFill>
-                <a:latin typeface="+mn-lt"/>
-                <a:ea typeface="+mn-ea"/>
-                <a:cs typeface="+mn-cs"/>
-              </a:defRPr>
-            </a:lvl5pPr>
-            <a:lvl6pPr marL="2514600" indent="-228600" algn="l" defTabSz="914400" rtl="0" eaLnBrk="1" latinLnBrk="0" hangingPunct="1">
-              <a:lnSpc>
-                <a:spcPct val="90000"/>
-              </a:lnSpc>
-              <a:spcBef>
-                <a:spcPts val="500"/>
-              </a:spcBef>
-              <a:buFont typeface="Arial" panose="020B0604020202020204" pitchFamily="34" charset="0"/>
-              <a:buChar char="•"/>
-              <a:defRPr sz="1800" kern="1200">
-                <a:solidFill>
-                  <a:schemeClr val="tx1"/>
-                </a:solidFill>
-                <a:latin typeface="+mn-lt"/>
-                <a:ea typeface="+mn-ea"/>
-                <a:cs typeface="+mn-cs"/>
-              </a:defRPr>
-            </a:lvl6pPr>
-            <a:lvl7pPr marL="2971800" indent="-228600" algn="l" defTabSz="914400" rtl="0" eaLnBrk="1" latinLnBrk="0" hangingPunct="1">
-              <a:lnSpc>
-                <a:spcPct val="90000"/>
-              </a:lnSpc>
-              <a:spcBef>
-                <a:spcPts val="500"/>
-              </a:spcBef>
-              <a:buFont typeface="Arial" panose="020B0604020202020204" pitchFamily="34" charset="0"/>
-              <a:buChar char="•"/>
-              <a:defRPr sz="1800" kern="1200">
-                <a:solidFill>
-                  <a:schemeClr val="tx1"/>
-                </a:solidFill>
-                <a:latin typeface="+mn-lt"/>
-                <a:ea typeface="+mn-ea"/>
-                <a:cs typeface="+mn-cs"/>
-              </a:defRPr>
-            </a:lvl7pPr>
-            <a:lvl8pPr marL="3429000" indent="-228600" algn="l" defTabSz="914400" rtl="0" eaLnBrk="1" latinLnBrk="0" hangingPunct="1">
-              <a:lnSpc>
-                <a:spcPct val="90000"/>
-              </a:lnSpc>
-              <a:spcBef>
-                <a:spcPts val="500"/>
-              </a:spcBef>
-              <a:buFont typeface="Arial" panose="020B0604020202020204" pitchFamily="34" charset="0"/>
-              <a:buChar char="•"/>
-              <a:defRPr sz="1800" kern="1200">
-                <a:solidFill>
-                  <a:schemeClr val="tx1"/>
-                </a:solidFill>
-                <a:latin typeface="+mn-lt"/>
-                <a:ea typeface="+mn-ea"/>
-                <a:cs typeface="+mn-cs"/>
-              </a:defRPr>
-            </a:lvl8pPr>
-            <a:lvl9pPr marL="3886200" indent="-228600" algn="l" defTabSz="914400" rtl="0" eaLnBrk="1" latinLnBrk="0" hangingPunct="1">
-              <a:lnSpc>
-                <a:spcPct val="90000"/>
-              </a:lnSpc>
-              <a:spcBef>
-                <a:spcPts val="500"/>
-              </a:spcBef>
-              <a:buFont typeface="Arial" panose="020B0604020202020204" pitchFamily="34" charset="0"/>
-              <a:buChar char="•"/>
-              <a:defRPr sz="1800" kern="1200">
-                <a:solidFill>
-                  <a:schemeClr val="tx1"/>
-                </a:solidFill>
-                <a:latin typeface="+mn-lt"/>
-                <a:ea typeface="+mn-ea"/>
-                <a:cs typeface="+mn-cs"/>
-              </a:defRPr>
-            </a:lvl9pPr>
-          </a:lstStyle>
-          <a:p>
-            <a:pPr marL="0" indent="0">
-              <a:buNone/>
-            </a:pPr>
-            <a:r>
-              <a:rPr lang="en-US" sz="1800" dirty="0"/>
-              <a:t>Predicted base: 24</a:t>
-            </a:r>
-          </a:p>
-        </p:txBody>
-      </p:sp>
-      <p:sp>
-        <p:nvSpPr>
-          <p:cNvPr id="28" name="Content Placeholder 2">
-            <a:extLst>
-              <a:ext uri="{FF2B5EF4-FFF2-40B4-BE49-F238E27FC236}">
-                <a16:creationId xmlns:a16="http://schemas.microsoft.com/office/drawing/2014/main" id="{B65507D0-4560-0A40-6DD9-7D81760C76CD}"/>
-              </a:ext>
-            </a:extLst>
-          </p:cNvPr>
-          <p:cNvSpPr txBox="1">
-            <a:spLocks/>
-          </p:cNvSpPr>
-          <p:nvPr/>
-        </p:nvSpPr>
-        <p:spPr>
-          <a:xfrm>
-            <a:off x="2591735" y="3517612"/>
-            <a:ext cx="1739633" cy="349398"/>
-          </a:xfrm>
-          <a:prstGeom prst="rect">
-            <a:avLst/>
-          </a:prstGeom>
-        </p:spPr>
-        <p:txBody>
-          <a:bodyPr vert="horz" lIns="91440" tIns="45720" rIns="91440" bIns="45720" rtlCol="0">
-            <a:normAutofit fontScale="92500" lnSpcReduction="10000"/>
-          </a:bodyPr>
-          <a:lstStyle>
-            <a:lvl1pPr marL="228600" indent="-228600" algn="l" defTabSz="914400" rtl="0" eaLnBrk="1" latinLnBrk="0" hangingPunct="1">
-              <a:lnSpc>
-                <a:spcPct val="100000"/>
-              </a:lnSpc>
-              <a:spcBef>
-                <a:spcPts val="1000"/>
-              </a:spcBef>
-              <a:buClr>
-                <a:schemeClr val="accent2"/>
-              </a:buClr>
-              <a:buFont typeface="Wingdings 2" panose="05020102010507070707" pitchFamily="18" charset="2"/>
-              <a:buChar char=""/>
-              <a:defRPr sz="2400" kern="1200">
-                <a:solidFill>
-                  <a:schemeClr val="tx2"/>
-                </a:solidFill>
-                <a:latin typeface="+mn-lt"/>
-                <a:ea typeface="+mn-ea"/>
-                <a:cs typeface="+mn-cs"/>
-              </a:defRPr>
-            </a:lvl1pPr>
-            <a:lvl2pPr marL="685800" indent="-228600" algn="l" defTabSz="914400" rtl="0" eaLnBrk="1" latinLnBrk="0" hangingPunct="1">
-              <a:lnSpc>
-                <a:spcPct val="100000"/>
-              </a:lnSpc>
-              <a:spcBef>
-                <a:spcPts val="500"/>
-              </a:spcBef>
-              <a:buClr>
-                <a:schemeClr val="accent2"/>
-              </a:buClr>
-              <a:buFont typeface="Wingdings 2" panose="05020102010507070707" pitchFamily="18" charset="2"/>
-              <a:buChar char=""/>
-              <a:defRPr sz="2200" kern="1200">
-                <a:solidFill>
-                  <a:schemeClr val="tx2"/>
-                </a:solidFill>
-                <a:latin typeface="+mn-lt"/>
-                <a:ea typeface="+mn-ea"/>
-                <a:cs typeface="+mn-cs"/>
-              </a:defRPr>
-            </a:lvl2pPr>
-            <a:lvl3pPr marL="1143000" indent="-228600" algn="l" defTabSz="914400" rtl="0" eaLnBrk="1" latinLnBrk="0" hangingPunct="1">
-              <a:lnSpc>
-                <a:spcPct val="100000"/>
-              </a:lnSpc>
-              <a:spcBef>
-                <a:spcPts val="500"/>
-              </a:spcBef>
-              <a:buClr>
-                <a:schemeClr val="accent2"/>
-              </a:buClr>
-              <a:buFont typeface="Wingdings 2" panose="05020102010507070707" pitchFamily="18" charset="2"/>
-              <a:buChar char=""/>
-              <a:defRPr sz="1800" kern="1200">
-                <a:solidFill>
-                  <a:schemeClr val="tx2"/>
-                </a:solidFill>
-                <a:latin typeface="+mn-lt"/>
-                <a:ea typeface="+mn-ea"/>
-                <a:cs typeface="+mn-cs"/>
-              </a:defRPr>
-            </a:lvl3pPr>
-            <a:lvl4pPr marL="1600200" indent="-228600" algn="l" defTabSz="914400" rtl="0" eaLnBrk="1" latinLnBrk="0" hangingPunct="1">
-              <a:lnSpc>
-                <a:spcPct val="100000"/>
-              </a:lnSpc>
-              <a:spcBef>
-                <a:spcPts val="500"/>
-              </a:spcBef>
-              <a:buClr>
-                <a:schemeClr val="accent2"/>
-              </a:buClr>
-              <a:buFont typeface="Wingdings 2" panose="05020102010507070707" pitchFamily="18" charset="2"/>
-              <a:buChar char=""/>
-              <a:defRPr sz="1600" kern="1200">
-                <a:solidFill>
-                  <a:schemeClr val="tx2"/>
-                </a:solidFill>
-                <a:latin typeface="+mn-lt"/>
-                <a:ea typeface="+mn-ea"/>
-                <a:cs typeface="+mn-cs"/>
-              </a:defRPr>
-            </a:lvl4pPr>
-            <a:lvl5pPr marL="2057400" indent="-228600" algn="l" defTabSz="914400" rtl="0" eaLnBrk="1" latinLnBrk="0" hangingPunct="1">
-              <a:lnSpc>
-                <a:spcPct val="100000"/>
-              </a:lnSpc>
-              <a:spcBef>
-                <a:spcPts val="500"/>
-              </a:spcBef>
-              <a:buClr>
-                <a:schemeClr val="accent2"/>
-              </a:buClr>
-              <a:buFont typeface="Wingdings 2" panose="05020102010507070707" pitchFamily="18" charset="2"/>
-              <a:buChar char=""/>
-              <a:defRPr sz="1400" kern="1200">
-                <a:solidFill>
-                  <a:schemeClr val="tx2"/>
-                </a:solidFill>
-                <a:latin typeface="+mn-lt"/>
-                <a:ea typeface="+mn-ea"/>
-                <a:cs typeface="+mn-cs"/>
-              </a:defRPr>
-            </a:lvl5pPr>
-            <a:lvl6pPr marL="2514600" indent="-228600" algn="l" defTabSz="914400" rtl="0" eaLnBrk="1" latinLnBrk="0" hangingPunct="1">
-              <a:lnSpc>
-                <a:spcPct val="90000"/>
-              </a:lnSpc>
-              <a:spcBef>
-                <a:spcPts val="500"/>
-              </a:spcBef>
-              <a:buFont typeface="Arial" panose="020B0604020202020204" pitchFamily="34" charset="0"/>
-              <a:buChar char="•"/>
-              <a:defRPr sz="1800" kern="1200">
-                <a:solidFill>
-                  <a:schemeClr val="tx1"/>
-                </a:solidFill>
-                <a:latin typeface="+mn-lt"/>
-                <a:ea typeface="+mn-ea"/>
-                <a:cs typeface="+mn-cs"/>
-              </a:defRPr>
-            </a:lvl6pPr>
-            <a:lvl7pPr marL="2971800" indent="-228600" algn="l" defTabSz="914400" rtl="0" eaLnBrk="1" latinLnBrk="0" hangingPunct="1">
-              <a:lnSpc>
-                <a:spcPct val="90000"/>
-              </a:lnSpc>
-              <a:spcBef>
-                <a:spcPts val="500"/>
-              </a:spcBef>
-              <a:buFont typeface="Arial" panose="020B0604020202020204" pitchFamily="34" charset="0"/>
-              <a:buChar char="•"/>
-              <a:defRPr sz="1800" kern="1200">
-                <a:solidFill>
-                  <a:schemeClr val="tx1"/>
-                </a:solidFill>
-                <a:latin typeface="+mn-lt"/>
-                <a:ea typeface="+mn-ea"/>
-                <a:cs typeface="+mn-cs"/>
-              </a:defRPr>
-            </a:lvl7pPr>
-            <a:lvl8pPr marL="3429000" indent="-228600" algn="l" defTabSz="914400" rtl="0" eaLnBrk="1" latinLnBrk="0" hangingPunct="1">
-              <a:lnSpc>
-                <a:spcPct val="90000"/>
-              </a:lnSpc>
-              <a:spcBef>
-                <a:spcPts val="500"/>
-              </a:spcBef>
-              <a:buFont typeface="Arial" panose="020B0604020202020204" pitchFamily="34" charset="0"/>
-              <a:buChar char="•"/>
-              <a:defRPr sz="1800" kern="1200">
-                <a:solidFill>
-                  <a:schemeClr val="tx1"/>
-                </a:solidFill>
-                <a:latin typeface="+mn-lt"/>
-                <a:ea typeface="+mn-ea"/>
-                <a:cs typeface="+mn-cs"/>
-              </a:defRPr>
-            </a:lvl8pPr>
-            <a:lvl9pPr marL="3886200" indent="-228600" algn="l" defTabSz="914400" rtl="0" eaLnBrk="1" latinLnBrk="0" hangingPunct="1">
-              <a:lnSpc>
-                <a:spcPct val="90000"/>
-              </a:lnSpc>
-              <a:spcBef>
-                <a:spcPts val="500"/>
-              </a:spcBef>
-              <a:buFont typeface="Arial" panose="020B0604020202020204" pitchFamily="34" charset="0"/>
-              <a:buChar char="•"/>
-              <a:defRPr sz="1800" kern="1200">
-                <a:solidFill>
-                  <a:schemeClr val="tx1"/>
-                </a:solidFill>
-                <a:latin typeface="+mn-lt"/>
-                <a:ea typeface="+mn-ea"/>
-                <a:cs typeface="+mn-cs"/>
-              </a:defRPr>
-            </a:lvl9pPr>
-          </a:lstStyle>
-          <a:p>
-            <a:pPr marL="0" indent="0">
-              <a:buNone/>
-            </a:pPr>
-            <a:r>
-              <a:rPr lang="en-US" sz="1800" dirty="0"/>
-              <a:t>Predicted base: 25</a:t>
-            </a:r>
-          </a:p>
-        </p:txBody>
-      </p:sp>
-      <p:sp>
-        <p:nvSpPr>
-          <p:cNvPr id="29" name="Content Placeholder 2">
-            <a:extLst>
-              <a:ext uri="{FF2B5EF4-FFF2-40B4-BE49-F238E27FC236}">
-                <a16:creationId xmlns:a16="http://schemas.microsoft.com/office/drawing/2014/main" id="{E6CAFD71-96B3-84EF-8A2A-89D5464B8838}"/>
-              </a:ext>
-            </a:extLst>
-          </p:cNvPr>
-          <p:cNvSpPr txBox="1">
-            <a:spLocks/>
-          </p:cNvSpPr>
-          <p:nvPr/>
-        </p:nvSpPr>
-        <p:spPr>
-          <a:xfrm>
-            <a:off x="450228" y="5767755"/>
-            <a:ext cx="1739633" cy="349398"/>
-          </a:xfrm>
-          <a:prstGeom prst="rect">
-            <a:avLst/>
-          </a:prstGeom>
-        </p:spPr>
-        <p:txBody>
-          <a:bodyPr vert="horz" lIns="91440" tIns="45720" rIns="91440" bIns="45720" rtlCol="0">
-            <a:normAutofit fontScale="92500" lnSpcReduction="10000"/>
-          </a:bodyPr>
-          <a:lstStyle>
-            <a:lvl1pPr marL="228600" indent="-228600" algn="l" defTabSz="914400" rtl="0" eaLnBrk="1" latinLnBrk="0" hangingPunct="1">
-              <a:lnSpc>
-                <a:spcPct val="100000"/>
-              </a:lnSpc>
-              <a:spcBef>
-                <a:spcPts val="1000"/>
-              </a:spcBef>
-              <a:buClr>
-                <a:schemeClr val="accent2"/>
-              </a:buClr>
-              <a:buFont typeface="Wingdings 2" panose="05020102010507070707" pitchFamily="18" charset="2"/>
-              <a:buChar char=""/>
-              <a:defRPr sz="2400" kern="1200">
-                <a:solidFill>
-                  <a:schemeClr val="tx2"/>
-                </a:solidFill>
-                <a:latin typeface="+mn-lt"/>
-                <a:ea typeface="+mn-ea"/>
-                <a:cs typeface="+mn-cs"/>
-              </a:defRPr>
-            </a:lvl1pPr>
-            <a:lvl2pPr marL="685800" indent="-228600" algn="l" defTabSz="914400" rtl="0" eaLnBrk="1" latinLnBrk="0" hangingPunct="1">
-              <a:lnSpc>
-                <a:spcPct val="100000"/>
-              </a:lnSpc>
-              <a:spcBef>
-                <a:spcPts val="500"/>
-              </a:spcBef>
-              <a:buClr>
-                <a:schemeClr val="accent2"/>
-              </a:buClr>
-              <a:buFont typeface="Wingdings 2" panose="05020102010507070707" pitchFamily="18" charset="2"/>
-              <a:buChar char=""/>
-              <a:defRPr sz="2200" kern="1200">
-                <a:solidFill>
-                  <a:schemeClr val="tx2"/>
-                </a:solidFill>
-                <a:latin typeface="+mn-lt"/>
-                <a:ea typeface="+mn-ea"/>
-                <a:cs typeface="+mn-cs"/>
-              </a:defRPr>
-            </a:lvl2pPr>
-            <a:lvl3pPr marL="1143000" indent="-228600" algn="l" defTabSz="914400" rtl="0" eaLnBrk="1" latinLnBrk="0" hangingPunct="1">
-              <a:lnSpc>
-                <a:spcPct val="100000"/>
-              </a:lnSpc>
-              <a:spcBef>
-                <a:spcPts val="500"/>
-              </a:spcBef>
-              <a:buClr>
-                <a:schemeClr val="accent2"/>
-              </a:buClr>
-              <a:buFont typeface="Wingdings 2" panose="05020102010507070707" pitchFamily="18" charset="2"/>
-              <a:buChar char=""/>
-              <a:defRPr sz="1800" kern="1200">
-                <a:solidFill>
-                  <a:schemeClr val="tx2"/>
-                </a:solidFill>
-                <a:latin typeface="+mn-lt"/>
-                <a:ea typeface="+mn-ea"/>
-                <a:cs typeface="+mn-cs"/>
-              </a:defRPr>
-            </a:lvl3pPr>
-            <a:lvl4pPr marL="1600200" indent="-228600" algn="l" defTabSz="914400" rtl="0" eaLnBrk="1" latinLnBrk="0" hangingPunct="1">
-              <a:lnSpc>
-                <a:spcPct val="100000"/>
-              </a:lnSpc>
-              <a:spcBef>
-                <a:spcPts val="500"/>
-              </a:spcBef>
-              <a:buClr>
-                <a:schemeClr val="accent2"/>
-              </a:buClr>
-              <a:buFont typeface="Wingdings 2" panose="05020102010507070707" pitchFamily="18" charset="2"/>
-              <a:buChar char=""/>
-              <a:defRPr sz="1600" kern="1200">
-                <a:solidFill>
-                  <a:schemeClr val="tx2"/>
-                </a:solidFill>
-                <a:latin typeface="+mn-lt"/>
-                <a:ea typeface="+mn-ea"/>
-                <a:cs typeface="+mn-cs"/>
-              </a:defRPr>
-            </a:lvl4pPr>
-            <a:lvl5pPr marL="2057400" indent="-228600" algn="l" defTabSz="914400" rtl="0" eaLnBrk="1" latinLnBrk="0" hangingPunct="1">
-              <a:lnSpc>
-                <a:spcPct val="100000"/>
-              </a:lnSpc>
-              <a:spcBef>
-                <a:spcPts val="500"/>
-              </a:spcBef>
-              <a:buClr>
-                <a:schemeClr val="accent2"/>
-              </a:buClr>
-              <a:buFont typeface="Wingdings 2" panose="05020102010507070707" pitchFamily="18" charset="2"/>
-              <a:buChar char=""/>
-              <a:defRPr sz="1400" kern="1200">
-                <a:solidFill>
-                  <a:schemeClr val="tx2"/>
-                </a:solidFill>
-                <a:latin typeface="+mn-lt"/>
-                <a:ea typeface="+mn-ea"/>
-                <a:cs typeface="+mn-cs"/>
-              </a:defRPr>
-            </a:lvl5pPr>
-            <a:lvl6pPr marL="2514600" indent="-228600" algn="l" defTabSz="914400" rtl="0" eaLnBrk="1" latinLnBrk="0" hangingPunct="1">
-              <a:lnSpc>
-                <a:spcPct val="90000"/>
-              </a:lnSpc>
-              <a:spcBef>
-                <a:spcPts val="500"/>
-              </a:spcBef>
-              <a:buFont typeface="Arial" panose="020B0604020202020204" pitchFamily="34" charset="0"/>
-              <a:buChar char="•"/>
-              <a:defRPr sz="1800" kern="1200">
-                <a:solidFill>
-                  <a:schemeClr val="tx1"/>
-                </a:solidFill>
-                <a:latin typeface="+mn-lt"/>
-                <a:ea typeface="+mn-ea"/>
-                <a:cs typeface="+mn-cs"/>
-              </a:defRPr>
-            </a:lvl6pPr>
-            <a:lvl7pPr marL="2971800" indent="-228600" algn="l" defTabSz="914400" rtl="0" eaLnBrk="1" latinLnBrk="0" hangingPunct="1">
-              <a:lnSpc>
-                <a:spcPct val="90000"/>
-              </a:lnSpc>
-              <a:spcBef>
-                <a:spcPts val="500"/>
-              </a:spcBef>
-              <a:buFont typeface="Arial" panose="020B0604020202020204" pitchFamily="34" charset="0"/>
-              <a:buChar char="•"/>
-              <a:defRPr sz="1800" kern="1200">
-                <a:solidFill>
-                  <a:schemeClr val="tx1"/>
-                </a:solidFill>
-                <a:latin typeface="+mn-lt"/>
-                <a:ea typeface="+mn-ea"/>
-                <a:cs typeface="+mn-cs"/>
-              </a:defRPr>
-            </a:lvl7pPr>
-            <a:lvl8pPr marL="3429000" indent="-228600" algn="l" defTabSz="914400" rtl="0" eaLnBrk="1" latinLnBrk="0" hangingPunct="1">
-              <a:lnSpc>
-                <a:spcPct val="90000"/>
-              </a:lnSpc>
-              <a:spcBef>
-                <a:spcPts val="500"/>
-              </a:spcBef>
-              <a:buFont typeface="Arial" panose="020B0604020202020204" pitchFamily="34" charset="0"/>
-              <a:buChar char="•"/>
-              <a:defRPr sz="1800" kern="1200">
-                <a:solidFill>
-                  <a:schemeClr val="tx1"/>
-                </a:solidFill>
-                <a:latin typeface="+mn-lt"/>
-                <a:ea typeface="+mn-ea"/>
-                <a:cs typeface="+mn-cs"/>
-              </a:defRPr>
-            </a:lvl8pPr>
-            <a:lvl9pPr marL="3886200" indent="-228600" algn="l" defTabSz="914400" rtl="0" eaLnBrk="1" latinLnBrk="0" hangingPunct="1">
-              <a:lnSpc>
-                <a:spcPct val="90000"/>
-              </a:lnSpc>
-              <a:spcBef>
-                <a:spcPts val="500"/>
-              </a:spcBef>
-              <a:buFont typeface="Arial" panose="020B0604020202020204" pitchFamily="34" charset="0"/>
-              <a:buChar char="•"/>
-              <a:defRPr sz="1800" kern="1200">
-                <a:solidFill>
-                  <a:schemeClr val="tx1"/>
-                </a:solidFill>
-                <a:latin typeface="+mn-lt"/>
-                <a:ea typeface="+mn-ea"/>
-                <a:cs typeface="+mn-cs"/>
-              </a:defRPr>
-            </a:lvl9pPr>
-          </a:lstStyle>
-          <a:p>
-            <a:pPr marL="0" indent="0">
-              <a:buNone/>
-            </a:pPr>
-            <a:r>
-              <a:rPr lang="en-US" sz="1800" dirty="0"/>
-              <a:t>Predicted base: 23</a:t>
-            </a:r>
-          </a:p>
-        </p:txBody>
-      </p:sp>
-      <p:sp>
-        <p:nvSpPr>
-          <p:cNvPr id="30" name="Content Placeholder 2">
-            <a:extLst>
-              <a:ext uri="{FF2B5EF4-FFF2-40B4-BE49-F238E27FC236}">
-                <a16:creationId xmlns:a16="http://schemas.microsoft.com/office/drawing/2014/main" id="{12686A8D-2014-4AE3-3279-32782BCE42BA}"/>
-              </a:ext>
-            </a:extLst>
-          </p:cNvPr>
-          <p:cNvSpPr txBox="1">
-            <a:spLocks/>
-          </p:cNvSpPr>
-          <p:nvPr/>
-        </p:nvSpPr>
-        <p:spPr>
-          <a:xfrm>
-            <a:off x="2591734" y="5736409"/>
-            <a:ext cx="1739633" cy="349398"/>
-          </a:xfrm>
-          <a:prstGeom prst="rect">
-            <a:avLst/>
-          </a:prstGeom>
-        </p:spPr>
-        <p:txBody>
-          <a:bodyPr vert="horz" lIns="91440" tIns="45720" rIns="91440" bIns="45720" rtlCol="0">
-            <a:normAutofit fontScale="92500" lnSpcReduction="10000"/>
-          </a:bodyPr>
-          <a:lstStyle>
-            <a:lvl1pPr marL="228600" indent="-228600" algn="l" defTabSz="914400" rtl="0" eaLnBrk="1" latinLnBrk="0" hangingPunct="1">
-              <a:lnSpc>
-                <a:spcPct val="100000"/>
-              </a:lnSpc>
-              <a:spcBef>
-                <a:spcPts val="1000"/>
-              </a:spcBef>
-              <a:buClr>
-                <a:schemeClr val="accent2"/>
-              </a:buClr>
-              <a:buFont typeface="Wingdings 2" panose="05020102010507070707" pitchFamily="18" charset="2"/>
-              <a:buChar char=""/>
-              <a:defRPr sz="2400" kern="1200">
-                <a:solidFill>
-                  <a:schemeClr val="tx2"/>
-                </a:solidFill>
-                <a:latin typeface="+mn-lt"/>
-                <a:ea typeface="+mn-ea"/>
-                <a:cs typeface="+mn-cs"/>
-              </a:defRPr>
-            </a:lvl1pPr>
-            <a:lvl2pPr marL="685800" indent="-228600" algn="l" defTabSz="914400" rtl="0" eaLnBrk="1" latinLnBrk="0" hangingPunct="1">
-              <a:lnSpc>
-                <a:spcPct val="100000"/>
-              </a:lnSpc>
-              <a:spcBef>
-                <a:spcPts val="500"/>
-              </a:spcBef>
-              <a:buClr>
-                <a:schemeClr val="accent2"/>
-              </a:buClr>
-              <a:buFont typeface="Wingdings 2" panose="05020102010507070707" pitchFamily="18" charset="2"/>
-              <a:buChar char=""/>
-              <a:defRPr sz="2200" kern="1200">
-                <a:solidFill>
-                  <a:schemeClr val="tx2"/>
-                </a:solidFill>
-                <a:latin typeface="+mn-lt"/>
-                <a:ea typeface="+mn-ea"/>
-                <a:cs typeface="+mn-cs"/>
-              </a:defRPr>
-            </a:lvl2pPr>
-            <a:lvl3pPr marL="1143000" indent="-228600" algn="l" defTabSz="914400" rtl="0" eaLnBrk="1" latinLnBrk="0" hangingPunct="1">
-              <a:lnSpc>
-                <a:spcPct val="100000"/>
-              </a:lnSpc>
-              <a:spcBef>
-                <a:spcPts val="500"/>
-              </a:spcBef>
-              <a:buClr>
-                <a:schemeClr val="accent2"/>
-              </a:buClr>
-              <a:buFont typeface="Wingdings 2" panose="05020102010507070707" pitchFamily="18" charset="2"/>
-              <a:buChar char=""/>
-              <a:defRPr sz="1800" kern="1200">
-                <a:solidFill>
-                  <a:schemeClr val="tx2"/>
-                </a:solidFill>
-                <a:latin typeface="+mn-lt"/>
-                <a:ea typeface="+mn-ea"/>
-                <a:cs typeface="+mn-cs"/>
-              </a:defRPr>
-            </a:lvl3pPr>
-            <a:lvl4pPr marL="1600200" indent="-228600" algn="l" defTabSz="914400" rtl="0" eaLnBrk="1" latinLnBrk="0" hangingPunct="1">
-              <a:lnSpc>
-                <a:spcPct val="100000"/>
-              </a:lnSpc>
-              <a:spcBef>
-                <a:spcPts val="500"/>
-              </a:spcBef>
-              <a:buClr>
-                <a:schemeClr val="accent2"/>
-              </a:buClr>
-              <a:buFont typeface="Wingdings 2" panose="05020102010507070707" pitchFamily="18" charset="2"/>
-              <a:buChar char=""/>
-              <a:defRPr sz="1600" kern="1200">
-                <a:solidFill>
-                  <a:schemeClr val="tx2"/>
-                </a:solidFill>
-                <a:latin typeface="+mn-lt"/>
-                <a:ea typeface="+mn-ea"/>
-                <a:cs typeface="+mn-cs"/>
-              </a:defRPr>
-            </a:lvl4pPr>
-            <a:lvl5pPr marL="2057400" indent="-228600" algn="l" defTabSz="914400" rtl="0" eaLnBrk="1" latinLnBrk="0" hangingPunct="1">
-              <a:lnSpc>
-                <a:spcPct val="100000"/>
-              </a:lnSpc>
-              <a:spcBef>
-                <a:spcPts val="500"/>
-              </a:spcBef>
-              <a:buClr>
-                <a:schemeClr val="accent2"/>
-              </a:buClr>
-              <a:buFont typeface="Wingdings 2" panose="05020102010507070707" pitchFamily="18" charset="2"/>
-              <a:buChar char=""/>
-              <a:defRPr sz="1400" kern="1200">
-                <a:solidFill>
-                  <a:schemeClr val="tx2"/>
-                </a:solidFill>
-                <a:latin typeface="+mn-lt"/>
-                <a:ea typeface="+mn-ea"/>
-                <a:cs typeface="+mn-cs"/>
-              </a:defRPr>
-            </a:lvl5pPr>
-            <a:lvl6pPr marL="2514600" indent="-228600" algn="l" defTabSz="914400" rtl="0" eaLnBrk="1" latinLnBrk="0" hangingPunct="1">
-              <a:lnSpc>
-                <a:spcPct val="90000"/>
-              </a:lnSpc>
-              <a:spcBef>
-                <a:spcPts val="500"/>
-              </a:spcBef>
-              <a:buFont typeface="Arial" panose="020B0604020202020204" pitchFamily="34" charset="0"/>
-              <a:buChar char="•"/>
-              <a:defRPr sz="1800" kern="1200">
-                <a:solidFill>
-                  <a:schemeClr val="tx1"/>
-                </a:solidFill>
-                <a:latin typeface="+mn-lt"/>
-                <a:ea typeface="+mn-ea"/>
-                <a:cs typeface="+mn-cs"/>
-              </a:defRPr>
-            </a:lvl6pPr>
-            <a:lvl7pPr marL="2971800" indent="-228600" algn="l" defTabSz="914400" rtl="0" eaLnBrk="1" latinLnBrk="0" hangingPunct="1">
-              <a:lnSpc>
-                <a:spcPct val="90000"/>
-              </a:lnSpc>
-              <a:spcBef>
-                <a:spcPts val="500"/>
-              </a:spcBef>
-              <a:buFont typeface="Arial" panose="020B0604020202020204" pitchFamily="34" charset="0"/>
-              <a:buChar char="•"/>
-              <a:defRPr sz="1800" kern="1200">
-                <a:solidFill>
-                  <a:schemeClr val="tx1"/>
-                </a:solidFill>
-                <a:latin typeface="+mn-lt"/>
-                <a:ea typeface="+mn-ea"/>
-                <a:cs typeface="+mn-cs"/>
-              </a:defRPr>
-            </a:lvl7pPr>
-            <a:lvl8pPr marL="3429000" indent="-228600" algn="l" defTabSz="914400" rtl="0" eaLnBrk="1" latinLnBrk="0" hangingPunct="1">
-              <a:lnSpc>
-                <a:spcPct val="90000"/>
-              </a:lnSpc>
-              <a:spcBef>
-                <a:spcPts val="500"/>
-              </a:spcBef>
-              <a:buFont typeface="Arial" panose="020B0604020202020204" pitchFamily="34" charset="0"/>
-              <a:buChar char="•"/>
-              <a:defRPr sz="1800" kern="1200">
-                <a:solidFill>
-                  <a:schemeClr val="tx1"/>
-                </a:solidFill>
-                <a:latin typeface="+mn-lt"/>
-                <a:ea typeface="+mn-ea"/>
-                <a:cs typeface="+mn-cs"/>
-              </a:defRPr>
-            </a:lvl8pPr>
-            <a:lvl9pPr marL="3886200" indent="-228600" algn="l" defTabSz="914400" rtl="0" eaLnBrk="1" latinLnBrk="0" hangingPunct="1">
-              <a:lnSpc>
-                <a:spcPct val="90000"/>
-              </a:lnSpc>
-              <a:spcBef>
-                <a:spcPts val="500"/>
-              </a:spcBef>
-              <a:buFont typeface="Arial" panose="020B0604020202020204" pitchFamily="34" charset="0"/>
-              <a:buChar char="•"/>
-              <a:defRPr sz="1800" kern="1200">
-                <a:solidFill>
-                  <a:schemeClr val="tx1"/>
-                </a:solidFill>
-                <a:latin typeface="+mn-lt"/>
-                <a:ea typeface="+mn-ea"/>
-                <a:cs typeface="+mn-cs"/>
-              </a:defRPr>
-            </a:lvl9pPr>
-          </a:lstStyle>
-          <a:p>
-            <a:pPr marL="0" indent="0">
-              <a:buNone/>
-            </a:pPr>
-            <a:r>
-              <a:rPr lang="en-US" sz="1800" dirty="0"/>
-              <a:t>Predicted base: 21</a:t>
-            </a:r>
-          </a:p>
-        </p:txBody>
-      </p:sp>
     </p:spTree>
     <p:extLst>
       <p:ext uri="{BB962C8B-B14F-4D97-AF65-F5344CB8AC3E}">
@@ -12846,8 +12840,8 @@
         </p:blipFill>
         <p:spPr>
           <a:xfrm>
-            <a:off x="7259718" y="1088064"/>
-            <a:ext cx="4743947" cy="4442059"/>
+            <a:off x="6897716" y="833421"/>
+            <a:ext cx="4873660" cy="4563518"/>
           </a:xfrm>
           <a:prstGeom prst="rect">
             <a:avLst/>
@@ -12876,8 +12870,8 @@
         </p:blipFill>
         <p:spPr>
           <a:xfrm>
-            <a:off x="1792224" y="2276043"/>
-            <a:ext cx="5051776" cy="3356521"/>
+            <a:off x="566420" y="1608355"/>
+            <a:ext cx="6126370" cy="4070507"/>
           </a:xfrm>
           <a:prstGeom prst="rect">
             <a:avLst/>
@@ -12963,7 +12957,7 @@
         </p:blipFill>
         <p:spPr>
           <a:xfrm>
-            <a:off x="1008597" y="1850866"/>
+            <a:off x="469518" y="1690688"/>
             <a:ext cx="10417812" cy="4206875"/>
           </a:xfrm>
           <a:prstGeom prst="rect">
